--- a/test/fixtures/sample.pptx
+++ b/test/fixtures/sample.pptx
@@ -28,6 +28,12 @@
               <a:t>Contact: sales@example.com</a:t>
             </a:r>
           </a:p>
+          <a:p>
+            <a:r>
+              <a:rPr lang="en-US"/>
+              <a:t>Escaped literal: &amp;lt;tag&amp;gt;</a:t>
+            </a:r>
+          </a:p>
         </p:txBody>
       </p:sp>
     </p:spTree>
